--- a/林子瑜-LLM_ETF_修訂四版_v20260608.pptx
+++ b/林子瑜-LLM_ETF_修訂四版_v20260608.pptx
@@ -5,7 +5,7 @@
     <p:sldMasterId id="2147483659" r:id="rId1"/>
   </p:sldMasterIdLst>
   <p:notesMasterIdLst>
-    <p:notesMasterId r:id="rId30"/>
+    <p:notesMasterId r:id="rId29"/>
   </p:notesMasterIdLst>
   <p:sldIdLst>
     <p:sldId id="256" r:id="rId2"/>
@@ -30,38 +30,37 @@
     <p:sldId id="561" r:id="rId21"/>
     <p:sldId id="562" r:id="rId22"/>
     <p:sldId id="270" r:id="rId23"/>
-    <p:sldId id="278" r:id="rId24"/>
-    <p:sldId id="272" r:id="rId25"/>
-    <p:sldId id="273" r:id="rId26"/>
-    <p:sldId id="274" r:id="rId27"/>
-    <p:sldId id="275" r:id="rId28"/>
-    <p:sldId id="276" r:id="rId29"/>
+    <p:sldId id="272" r:id="rId24"/>
+    <p:sldId id="273" r:id="rId25"/>
+    <p:sldId id="274" r:id="rId26"/>
+    <p:sldId id="275" r:id="rId27"/>
+    <p:sldId id="276" r:id="rId28"/>
   </p:sldIdLst>
   <p:sldSz cx="12192000" cy="6858000"/>
   <p:notesSz cx="6858000" cy="9144000"/>
   <p:embeddedFontLst>
     <p:embeddedFont>
       <p:font typeface="Amasis MT Pro Medium" panose="02040604050005020304" pitchFamily="18" charset="0"/>
-      <p:regular r:id="rId31"/>
-      <p:italic r:id="rId32"/>
+      <p:regular r:id="rId30"/>
+      <p:italic r:id="rId31"/>
     </p:embeddedFont>
     <p:embeddedFont>
       <p:font typeface="DM Sans" pitchFamily="2" charset="0"/>
-      <p:regular r:id="rId33"/>
-      <p:bold r:id="rId34"/>
-      <p:italic r:id="rId35"/>
-      <p:boldItalic r:id="rId36"/>
+      <p:regular r:id="rId32"/>
+      <p:bold r:id="rId33"/>
+      <p:italic r:id="rId34"/>
+      <p:boldItalic r:id="rId35"/>
     </p:embeddedFont>
     <p:embeddedFont>
       <p:font typeface="Merriweather" panose="00000500000000000000" pitchFamily="2" charset="0"/>
-      <p:regular r:id="rId37"/>
-      <p:bold r:id="rId38"/>
-      <p:italic r:id="rId39"/>
-      <p:boldItalic r:id="rId40"/>
+      <p:regular r:id="rId36"/>
+      <p:bold r:id="rId37"/>
+      <p:italic r:id="rId38"/>
+      <p:boldItalic r:id="rId39"/>
     </p:embeddedFont>
     <p:embeddedFont>
       <p:font typeface="標楷體" panose="03000509000000000000" pitchFamily="65" charset="-120"/>
-      <p:regular r:id="rId41"/>
+      <p:regular r:id="rId40"/>
     </p:embeddedFont>
   </p:embeddedFontLst>
   <p:defaultTextStyle>
@@ -2267,13 +2266,7 @@
   <p:cSld>
     <p:spTree>
       <p:nvGrpSpPr>
-        <p:cNvPr id="1" name="Shape 331">
-          <a:extLst>
-            <a:ext uri="{FF2B5EF4-FFF2-40B4-BE49-F238E27FC236}">
-              <a16:creationId xmlns:a16="http://schemas.microsoft.com/office/drawing/2014/main" id="{D265B3C7-2463-84DC-3480-DC40C28BEE6F}"/>
-            </a:ext>
-          </a:extLst>
-        </p:cNvPr>
+        <p:cNvPr id="1" name="Shape 351"/>
         <p:cNvGrpSpPr/>
         <p:nvPr/>
       </p:nvGrpSpPr>
@@ -2287,13 +2280,7 @@
       </p:grpSpPr>
       <p:sp>
         <p:nvSpPr>
-          <p:cNvPr id="332" name="Google Shape;332;p15:notes">
-            <a:extLst>
-              <a:ext uri="{FF2B5EF4-FFF2-40B4-BE49-F238E27FC236}">
-                <a16:creationId xmlns:a16="http://schemas.microsoft.com/office/drawing/2014/main" id="{5D9BF4EB-97F8-8C15-88BD-0B5BD5BA1DC9}"/>
-              </a:ext>
-            </a:extLst>
-          </p:cNvPr>
+          <p:cNvPr id="352" name="Google Shape;352;p17:notes"/>
           <p:cNvSpPr txBox="1">
             <a:spLocks noGrp="1"/>
           </p:cNvSpPr>
@@ -2316,6 +2303,31 @@
           </a:bodyPr>
           <a:lstStyle/>
           <a:p>
+            <a:pPr marL="0" marR="0" lvl="0" indent="0" algn="l" defTabSz="914400" rtl="0" eaLnBrk="1" fontAlgn="auto" latinLnBrk="0" hangingPunct="1">
+              <a:lnSpc>
+                <a:spcPct val="100000"/>
+              </a:lnSpc>
+              <a:spcBef>
+                <a:spcPts val="0"/>
+              </a:spcBef>
+              <a:spcAft>
+                <a:spcPts val="0"/>
+              </a:spcAft>
+              <a:buClr>
+                <a:srgbClr val="000000"/>
+              </a:buClr>
+              <a:buSzPts val="1100"/>
+              <a:buFont typeface="Arial"/>
+              <a:buNone/>
+              <a:tabLst/>
+              <a:defRPr/>
+            </a:pPr>
+            <a:r>
+              <a:rPr lang="zh-TW" altLang="zh-TW" dirty="0"/>
+              <a:t>平台用 Streamlit 加 Plotly、SQLite，串接 GPT 或 Gemini 產生風險摘要，端對端延遲 840 毫秒，一般電腦、不用 GPU 就能跑。</a:t>
+            </a:r>
+          </a:p>
+          <a:p>
             <a:pPr marL="0" lvl="0" indent="0" algn="l" rtl="0">
               <a:spcBef>
                 <a:spcPts val="0"/>
@@ -2325,23 +2337,13 @@
               </a:spcAft>
               <a:buNone/>
             </a:pPr>
-            <a:r>
-              <a:rPr lang="zh-TW" altLang="zh-TW" dirty="0"/>
-              <a:t>這頁是迴歸的收尾，分兩塊看。左邊是傳統四個模型預測『報酬率』的結果，R² 全部接近 0 甚至為負，比直接猜 0% 還差——這正好驗證隨機漫步理論，次日漲跌幅本來就難預測。右邊是 LLM 的探索：GPT-4o-mini 在 50 筆小樣本上 R² 是 0.80，看起來不錯，但因為樣本太少、又跟傳統模型不是同一個驗證基準，我只把它定位成潛力探索，不做直接比較。整體來說，迴歸這部分告訴我們：價格水準預測贏不過基準、報酬率預測接近隨機，所以真正的價值在於分類輔助和 LLM 的可解釋性。</a:t>
-            </a:r>
             <a:endParaRPr dirty="0"/>
           </a:p>
         </p:txBody>
       </p:sp>
       <p:sp>
         <p:nvSpPr>
-          <p:cNvPr id="333" name="Google Shape;333;p15:notes">
-            <a:extLst>
-              <a:ext uri="{FF2B5EF4-FFF2-40B4-BE49-F238E27FC236}">
-                <a16:creationId xmlns:a16="http://schemas.microsoft.com/office/drawing/2014/main" id="{B64CD026-CCE8-5E70-4609-5E0BAA084CCF}"/>
-              </a:ext>
-            </a:extLst>
-          </p:cNvPr>
+          <p:cNvPr id="353" name="Google Shape;353;p17:notes"/>
           <p:cNvSpPr>
             <a:spLocks noGrp="1" noRot="1" noChangeAspect="1"/>
           </p:cNvSpPr>
@@ -2388,11 +2390,6 @@
         </p:txBody>
       </p:sp>
     </p:spTree>
-    <p:extLst>
-      <p:ext uri="{BB962C8B-B14F-4D97-AF65-F5344CB8AC3E}">
-        <p14:creationId xmlns:p14="http://schemas.microsoft.com/office/powerpoint/2010/main" val="4052227862"/>
-      </p:ext>
-    </p:extLst>
   </p:cSld>
   <p:clrMapOvr>
     <a:masterClrMapping/>
@@ -2401,142 +2398,6 @@
 </file>
 
 <file path=ppt/notesSlides/notesSlide21.xml><?xml version="1.0" encoding="utf-8"?>
-<p:notes xmlns:a="http://schemas.openxmlformats.org/drawingml/2006/main" xmlns:r="http://schemas.openxmlformats.org/officeDocument/2006/relationships" xmlns:p="http://schemas.openxmlformats.org/presentationml/2006/main" showMasterSp="0" showMasterPhAnim="0">
-  <p:cSld>
-    <p:spTree>
-      <p:nvGrpSpPr>
-        <p:cNvPr id="1" name="Shape 351"/>
-        <p:cNvGrpSpPr/>
-        <p:nvPr/>
-      </p:nvGrpSpPr>
-      <p:grpSpPr>
-        <a:xfrm>
-          <a:off x="0" y="0"/>
-          <a:ext cx="0" cy="0"/>
-          <a:chOff x="0" y="0"/>
-          <a:chExt cx="0" cy="0"/>
-        </a:xfrm>
-      </p:grpSpPr>
-      <p:sp>
-        <p:nvSpPr>
-          <p:cNvPr id="352" name="Google Shape;352;p17:notes"/>
-          <p:cNvSpPr txBox="1">
-            <a:spLocks noGrp="1"/>
-          </p:cNvSpPr>
-          <p:nvPr>
-            <p:ph type="body" idx="1"/>
-          </p:nvPr>
-        </p:nvSpPr>
-        <p:spPr>
-          <a:xfrm>
-            <a:off x="685800" y="4343400"/>
-            <a:ext cx="5486400" cy="4114800"/>
-          </a:xfrm>
-          <a:prstGeom prst="rect">
-            <a:avLst/>
-          </a:prstGeom>
-        </p:spPr>
-        <p:txBody>
-          <a:bodyPr spcFirstLastPara="1" wrap="square" lIns="91425" tIns="91425" rIns="91425" bIns="91425" anchor="t" anchorCtr="0">
-            <a:noAutofit/>
-          </a:bodyPr>
-          <a:lstStyle/>
-          <a:p>
-            <a:pPr marL="0" marR="0" lvl="0" indent="0" algn="l" defTabSz="914400" rtl="0" eaLnBrk="1" fontAlgn="auto" latinLnBrk="0" hangingPunct="1">
-              <a:lnSpc>
-                <a:spcPct val="100000"/>
-              </a:lnSpc>
-              <a:spcBef>
-                <a:spcPts val="0"/>
-              </a:spcBef>
-              <a:spcAft>
-                <a:spcPts val="0"/>
-              </a:spcAft>
-              <a:buClr>
-                <a:srgbClr val="000000"/>
-              </a:buClr>
-              <a:buSzPts val="1100"/>
-              <a:buFont typeface="Arial"/>
-              <a:buNone/>
-              <a:tabLst/>
-              <a:defRPr/>
-            </a:pPr>
-            <a:r>
-              <a:rPr lang="zh-TW" altLang="zh-TW" dirty="0"/>
-              <a:t>平台用 Streamlit 加 Plotly、SQLite，串接 GPT 或 Gemini 產生風險摘要，端對端延遲 840 毫秒，一般電腦、不用 GPU 就能跑。</a:t>
-            </a:r>
-          </a:p>
-          <a:p>
-            <a:pPr marL="0" lvl="0" indent="0" algn="l" rtl="0">
-              <a:spcBef>
-                <a:spcPts val="0"/>
-              </a:spcBef>
-              <a:spcAft>
-                <a:spcPts val="0"/>
-              </a:spcAft>
-              <a:buNone/>
-            </a:pPr>
-            <a:endParaRPr dirty="0"/>
-          </a:p>
-        </p:txBody>
-      </p:sp>
-      <p:sp>
-        <p:nvSpPr>
-          <p:cNvPr id="353" name="Google Shape;353;p17:notes"/>
-          <p:cNvSpPr>
-            <a:spLocks noGrp="1" noRot="1" noChangeAspect="1"/>
-          </p:cNvSpPr>
-          <p:nvPr>
-            <p:ph type="sldImg" idx="2"/>
-          </p:nvPr>
-        </p:nvSpPr>
-        <p:spPr>
-          <a:xfrm>
-            <a:off x="381000" y="685800"/>
-            <a:ext cx="6096000" cy="3429000"/>
-          </a:xfrm>
-          <a:custGeom>
-            <a:avLst/>
-            <a:gdLst/>
-            <a:ahLst/>
-            <a:cxnLst/>
-            <a:rect l="l" t="t" r="r" b="b"/>
-            <a:pathLst>
-              <a:path w="120000" h="120000" extrusionOk="0">
-                <a:moveTo>
-                  <a:pt x="0" y="0"/>
-                </a:moveTo>
-                <a:lnTo>
-                  <a:pt x="120000" y="0"/>
-                </a:lnTo>
-                <a:lnTo>
-                  <a:pt x="120000" y="120000"/>
-                </a:lnTo>
-                <a:lnTo>
-                  <a:pt x="0" y="120000"/>
-                </a:lnTo>
-                <a:close/>
-              </a:path>
-            </a:pathLst>
-          </a:custGeom>
-        </p:spPr>
-        <p:txBody>
-          <a:bodyPr/>
-          <a:lstStyle/>
-          <a:p>
-            <a:endParaRPr lang="zh-TW" altLang="en-US"/>
-          </a:p>
-        </p:txBody>
-      </p:sp>
-    </p:spTree>
-  </p:cSld>
-  <p:clrMapOvr>
-    <a:masterClrMapping/>
-  </p:clrMapOvr>
-</p:notes>
-</file>
-
-<file path=ppt/notesSlides/notesSlide22.xml><?xml version="1.0" encoding="utf-8"?>
 <p:notes xmlns:a="http://schemas.openxmlformats.org/drawingml/2006/main" xmlns:r="http://schemas.openxmlformats.org/officeDocument/2006/relationships" xmlns:p="http://schemas.openxmlformats.org/presentationml/2006/main" showMasterSp="0" showMasterPhAnim="0">
   <p:cSld>
     <p:spTree>
@@ -2647,7 +2508,7 @@
 </p:notes>
 </file>
 
-<file path=ppt/notesSlides/notesSlide23.xml><?xml version="1.0" encoding="utf-8"?>
+<file path=ppt/notesSlides/notesSlide22.xml><?xml version="1.0" encoding="utf-8"?>
 <p:notes xmlns:a="http://schemas.openxmlformats.org/drawingml/2006/main" xmlns:r="http://schemas.openxmlformats.org/officeDocument/2006/relationships" xmlns:p="http://schemas.openxmlformats.org/presentationml/2006/main" showMasterSp="0" showMasterPhAnim="0">
   <p:cSld>
     <p:spTree>
@@ -2762,7 +2623,7 @@
 </p:notes>
 </file>
 
-<file path=ppt/notesSlides/notesSlide24.xml><?xml version="1.0" encoding="utf-8"?>
+<file path=ppt/notesSlides/notesSlide23.xml><?xml version="1.0" encoding="utf-8"?>
 <p:notes xmlns:a="http://schemas.openxmlformats.org/drawingml/2006/main" xmlns:r="http://schemas.openxmlformats.org/officeDocument/2006/relationships" xmlns:p="http://schemas.openxmlformats.org/presentationml/2006/main" showMasterSp="0" showMasterPhAnim="0">
   <p:cSld>
     <p:spTree>
@@ -2873,7 +2734,7 @@
 </p:notes>
 </file>
 
-<file path=ppt/notesSlides/notesSlide25.xml><?xml version="1.0" encoding="utf-8"?>
+<file path=ppt/notesSlides/notesSlide24.xml><?xml version="1.0" encoding="utf-8"?>
 <p:notes xmlns:a="http://schemas.openxmlformats.org/drawingml/2006/main" xmlns:r="http://schemas.openxmlformats.org/officeDocument/2006/relationships" xmlns:p="http://schemas.openxmlformats.org/presentationml/2006/main" showMasterSp="0" showMasterPhAnim="0">
   <p:cSld>
     <p:spTree>
@@ -24825,418 +24686,6 @@
 <file path=ppt/slides/slide23.xml><?xml version="1.0" encoding="utf-8"?>
 <p:sld xmlns:a="http://schemas.openxmlformats.org/drawingml/2006/main" xmlns:r="http://schemas.openxmlformats.org/officeDocument/2006/relationships" xmlns:p="http://schemas.openxmlformats.org/presentationml/2006/main">
   <p:cSld>
-    <p:spTree>
-      <p:nvGrpSpPr>
-        <p:cNvPr id="1" name="Shape 334">
-          <a:extLst>
-            <a:ext uri="{FF2B5EF4-FFF2-40B4-BE49-F238E27FC236}">
-              <a16:creationId xmlns:a16="http://schemas.microsoft.com/office/drawing/2014/main" id="{68B6826A-3E1B-A5D6-A56B-C042856A901F}"/>
-            </a:ext>
-          </a:extLst>
-        </p:cNvPr>
-        <p:cNvGrpSpPr/>
-        <p:nvPr/>
-      </p:nvGrpSpPr>
-      <p:grpSpPr>
-        <a:xfrm>
-          <a:off x="0" y="0"/>
-          <a:ext cx="0" cy="0"/>
-          <a:chOff x="0" y="0"/>
-          <a:chExt cx="0" cy="0"/>
-        </a:xfrm>
-      </p:grpSpPr>
-      <p:pic>
-        <p:nvPicPr>
-          <p:cNvPr id="335" name="Google Shape;335;p27" descr="image.png">
-            <a:extLst>
-              <a:ext uri="{FF2B5EF4-FFF2-40B4-BE49-F238E27FC236}">
-                <a16:creationId xmlns:a16="http://schemas.microsoft.com/office/drawing/2014/main" id="{3D136D3F-AC91-4700-1460-B56A5A30B761}"/>
-              </a:ext>
-            </a:extLst>
-          </p:cNvPr>
-          <p:cNvPicPr preferRelativeResize="0"/>
-          <p:nvPr/>
-        </p:nvPicPr>
-        <p:blipFill rotWithShape="1">
-          <a:blip r:embed="rId3">
-            <a:alphaModFix/>
-          </a:blip>
-          <a:srcRect/>
-          <a:stretch/>
-        </p:blipFill>
-        <p:spPr>
-          <a:xfrm>
-            <a:off x="30957" y="0"/>
-            <a:ext cx="12192000" cy="6858000"/>
-          </a:xfrm>
-          <a:prstGeom prst="rect">
-            <a:avLst/>
-          </a:prstGeom>
-          <a:noFill/>
-          <a:ln>
-            <a:noFill/>
-          </a:ln>
-        </p:spPr>
-      </p:pic>
-      <p:sp>
-        <p:nvSpPr>
-          <p:cNvPr id="339" name="Google Shape;339;p27">
-            <a:extLst>
-              <a:ext uri="{FF2B5EF4-FFF2-40B4-BE49-F238E27FC236}">
-                <a16:creationId xmlns:a16="http://schemas.microsoft.com/office/drawing/2014/main" id="{FDAB8146-B13F-F508-E83B-C868E2D652ED}"/>
-              </a:ext>
-            </a:extLst>
-          </p:cNvPr>
-          <p:cNvSpPr txBox="1"/>
-          <p:nvPr/>
-        </p:nvSpPr>
-        <p:spPr>
-          <a:xfrm>
-            <a:off x="809625" y="919311"/>
-            <a:ext cx="11351418" cy="609398"/>
-          </a:xfrm>
-          <a:prstGeom prst="rect">
-            <a:avLst/>
-          </a:prstGeom>
-          <a:noFill/>
-          <a:ln>
-            <a:noFill/>
-          </a:ln>
-        </p:spPr>
-        <p:txBody>
-          <a:bodyPr spcFirstLastPara="1" wrap="square" lIns="0" tIns="0" rIns="0" bIns="0" anchor="t" anchorCtr="0">
-            <a:spAutoFit/>
-          </a:bodyPr>
-          <a:lstStyle/>
-          <a:p>
-            <a:pPr marL="0" marR="0" lvl="0" indent="0" algn="l" rtl="0">
-              <a:lnSpc>
-                <a:spcPct val="119969"/>
-              </a:lnSpc>
-              <a:spcBef>
-                <a:spcPts val="0"/>
-              </a:spcBef>
-              <a:spcAft>
-                <a:spcPts val="0"/>
-              </a:spcAft>
-              <a:buNone/>
-            </a:pPr>
-            <a:r>
-              <a:rPr lang="zh-TW" altLang="en-US" sz="3300" b="1" i="0" u="none" strike="noStrike" cap="none" dirty="0">
-                <a:solidFill>
-                  <a:srgbClr val="002147"/>
-                </a:solidFill>
-                <a:latin typeface="Merriweather"/>
-                <a:ea typeface="Merriweather"/>
-                <a:cs typeface="Merriweather"/>
-                <a:sym typeface="Merriweather"/>
-              </a:rPr>
-              <a:t>迴歸結果：</a:t>
-            </a:r>
-            <a:r>
-              <a:rPr lang="zh-TW" altLang="en-US" sz="3300" b="1" i="0" u="none" strike="noStrike" cap="none" dirty="0">
-                <a:solidFill>
-                  <a:srgbClr val="FF0000"/>
-                </a:solidFill>
-                <a:latin typeface="Merriweather"/>
-                <a:ea typeface="Merriweather"/>
-                <a:cs typeface="Merriweather"/>
-                <a:sym typeface="Merriweather"/>
-              </a:rPr>
-              <a:t>報酬率</a:t>
-            </a:r>
-            <a:r>
-              <a:rPr lang="zh-TW" altLang="en-US" sz="3300" b="1" i="0" u="none" strike="noStrike" cap="none" dirty="0">
-                <a:solidFill>
-                  <a:srgbClr val="002147"/>
-                </a:solidFill>
-                <a:latin typeface="Merriweather"/>
-                <a:ea typeface="Merriweather"/>
-                <a:cs typeface="Merriweather"/>
-                <a:sym typeface="Merriweather"/>
-              </a:rPr>
-              <a:t>預測與 </a:t>
-            </a:r>
-            <a:r>
-              <a:rPr lang="en-US" altLang="zh-TW" sz="3300" b="1" i="0" u="none" strike="noStrike" cap="none" dirty="0">
-                <a:solidFill>
-                  <a:srgbClr val="002147"/>
-                </a:solidFill>
-                <a:latin typeface="Merriweather"/>
-                <a:ea typeface="Merriweather"/>
-                <a:cs typeface="Merriweather"/>
-                <a:sym typeface="Merriweather"/>
-              </a:rPr>
-              <a:t>LLM? </a:t>
-            </a:r>
-            <a:endParaRPr dirty="0"/>
-          </a:p>
-        </p:txBody>
-      </p:sp>
-      <p:sp>
-        <p:nvSpPr>
-          <p:cNvPr id="340" name="Google Shape;340;p27">
-            <a:extLst>
-              <a:ext uri="{FF2B5EF4-FFF2-40B4-BE49-F238E27FC236}">
-                <a16:creationId xmlns:a16="http://schemas.microsoft.com/office/drawing/2014/main" id="{5C940DF7-030A-DA3E-DFC4-9834AD135FCC}"/>
-              </a:ext>
-            </a:extLst>
-          </p:cNvPr>
-          <p:cNvSpPr/>
-          <p:nvPr/>
-        </p:nvSpPr>
-        <p:spPr>
-          <a:xfrm>
-            <a:off x="571500" y="919311"/>
-            <a:ext cx="76200" cy="502890"/>
-          </a:xfrm>
-          <a:prstGeom prst="rect">
-            <a:avLst/>
-          </a:prstGeom>
-          <a:solidFill>
-            <a:srgbClr val="D4AF37"/>
-          </a:solidFill>
-          <a:ln>
-            <a:noFill/>
-          </a:ln>
-        </p:spPr>
-        <p:txBody>
-          <a:bodyPr spcFirstLastPara="1" wrap="square" lIns="91425" tIns="45700" rIns="91425" bIns="45700" anchor="ctr" anchorCtr="0">
-            <a:noAutofit/>
-          </a:bodyPr>
-          <a:lstStyle/>
-          <a:p>
-            <a:pPr marL="0" marR="0" lvl="0" indent="0" algn="ctr" rtl="0">
-              <a:spcBef>
-                <a:spcPts val="0"/>
-              </a:spcBef>
-              <a:spcAft>
-                <a:spcPts val="0"/>
-              </a:spcAft>
-              <a:buNone/>
-            </a:pPr>
-            <a:endParaRPr sz="1800" b="0" i="0" u="none" strike="noStrike" cap="none">
-              <a:solidFill>
-                <a:schemeClr val="dk1"/>
-              </a:solidFill>
-              <a:latin typeface="Calibri"/>
-              <a:ea typeface="Calibri"/>
-              <a:cs typeface="Calibri"/>
-              <a:sym typeface="Calibri"/>
-            </a:endParaRPr>
-          </a:p>
-        </p:txBody>
-      </p:sp>
-      <p:sp>
-        <p:nvSpPr>
-          <p:cNvPr id="7" name="Google Shape;338;p27">
-            <a:extLst>
-              <a:ext uri="{FF2B5EF4-FFF2-40B4-BE49-F238E27FC236}">
-                <a16:creationId xmlns:a16="http://schemas.microsoft.com/office/drawing/2014/main" id="{114178FA-8F82-E196-7E37-05BB87DD2ED2}"/>
-              </a:ext>
-            </a:extLst>
-          </p:cNvPr>
-          <p:cNvSpPr txBox="1"/>
-          <p:nvPr/>
-        </p:nvSpPr>
-        <p:spPr>
-          <a:xfrm>
-            <a:off x="571500" y="5565336"/>
-            <a:ext cx="10337132" cy="415498"/>
-          </a:xfrm>
-          <a:prstGeom prst="rect">
-            <a:avLst/>
-          </a:prstGeom>
-          <a:solidFill>
-            <a:srgbClr val="FFFF00"/>
-          </a:solidFill>
-          <a:ln>
-            <a:noFill/>
-          </a:ln>
-        </p:spPr>
-        <p:txBody>
-          <a:bodyPr spcFirstLastPara="1" wrap="square" lIns="0" tIns="0" rIns="0" bIns="0" anchor="t" anchorCtr="0">
-            <a:spAutoFit/>
-          </a:bodyPr>
-          <a:lstStyle/>
-          <a:p>
-            <a:pPr lvl="0" algn="ctr">
-              <a:lnSpc>
-                <a:spcPct val="150000"/>
-              </a:lnSpc>
-            </a:pPr>
-            <a:r>
-              <a:rPr lang="zh-TW" altLang="zh-TW" sz="1800" dirty="0"/>
-              <a:t>四模型預測次日報酬率 R² 均接近 0 或為負，呼應隨機漫步理論——次日漲跌幅難以由技術指標預測。</a:t>
-            </a:r>
-            <a:endParaRPr sz="1800" dirty="0"/>
-          </a:p>
-        </p:txBody>
-      </p:sp>
-      <p:pic>
-        <p:nvPicPr>
-          <p:cNvPr id="4" name="圖片 3">
-            <a:extLst>
-              <a:ext uri="{FF2B5EF4-FFF2-40B4-BE49-F238E27FC236}">
-                <a16:creationId xmlns:a16="http://schemas.microsoft.com/office/drawing/2014/main" id="{E256F9FB-99E9-8EA3-B461-63569B68EB9C}"/>
-              </a:ext>
-            </a:extLst>
-          </p:cNvPr>
-          <p:cNvPicPr>
-            <a:picLocks noChangeAspect="1"/>
-          </p:cNvPicPr>
-          <p:nvPr/>
-        </p:nvPicPr>
-        <p:blipFill>
-          <a:blip r:embed="rId4"/>
-          <a:srcRect l="-1" t="8206" r="-4376"/>
-          <a:stretch>
-            <a:fillRect/>
-          </a:stretch>
-        </p:blipFill>
-        <p:spPr>
-          <a:xfrm>
-            <a:off x="436945" y="1905802"/>
-            <a:ext cx="7031318" cy="3177232"/>
-          </a:xfrm>
-          <a:prstGeom prst="rect">
-            <a:avLst/>
-          </a:prstGeom>
-        </p:spPr>
-      </p:pic>
-      <p:sp>
-        <p:nvSpPr>
-          <p:cNvPr id="3" name="文字方塊 2">
-            <a:extLst>
-              <a:ext uri="{FF2B5EF4-FFF2-40B4-BE49-F238E27FC236}">
-                <a16:creationId xmlns:a16="http://schemas.microsoft.com/office/drawing/2014/main" id="{22C145BC-CB14-3FE6-7505-C22332A732CE}"/>
-              </a:ext>
-            </a:extLst>
-          </p:cNvPr>
-          <p:cNvSpPr txBox="1"/>
-          <p:nvPr/>
-        </p:nvSpPr>
-        <p:spPr>
-          <a:xfrm>
-            <a:off x="7530177" y="2716026"/>
-            <a:ext cx="4224878" cy="1661993"/>
-          </a:xfrm>
-          <a:prstGeom prst="rect">
-            <a:avLst/>
-          </a:prstGeom>
-          <a:solidFill>
-            <a:srgbClr val="FFFF00"/>
-          </a:solidFill>
-          <a:ln>
-            <a:noFill/>
-          </a:ln>
-        </p:spPr>
-        <p:txBody>
-          <a:bodyPr spcFirstLastPara="1" wrap="square" lIns="0" tIns="0" rIns="0" bIns="0" anchor="t" anchorCtr="0">
-            <a:spAutoFit/>
-          </a:bodyPr>
-          <a:lstStyle>
-            <a:defPPr marR="0" lvl="0" algn="l" rtl="0">
-              <a:lnSpc>
-                <a:spcPct val="100000"/>
-              </a:lnSpc>
-              <a:spcBef>
-                <a:spcPts val="0"/>
-              </a:spcBef>
-              <a:spcAft>
-                <a:spcPts val="0"/>
-              </a:spcAft>
-            </a:defPPr>
-            <a:lvl1pPr>
-              <a:lnSpc>
-                <a:spcPct val="150000"/>
-              </a:lnSpc>
-              <a:defRPr sz="1600"/>
-            </a:lvl1pPr>
-          </a:lstStyle>
-          <a:p>
-            <a:r>
-              <a:rPr lang="zh-TW" altLang="zh-TW" sz="1800" dirty="0"/>
-              <a:t>GPT-4o-mini（小樣本 50 個交易日） R² = 0.80　MAE = 5.23　RMSE = 6.58 樣本數有限，僅作為 LLM 數值預測之潛力探索，不與傳統模型直接比較。</a:t>
-            </a:r>
-            <a:endParaRPr lang="zh-TW" altLang="en-US" sz="1800" dirty="0"/>
-          </a:p>
-        </p:txBody>
-      </p:sp>
-      <p:sp>
-        <p:nvSpPr>
-          <p:cNvPr id="8" name="文字方塊 7">
-            <a:extLst>
-              <a:ext uri="{FF2B5EF4-FFF2-40B4-BE49-F238E27FC236}">
-                <a16:creationId xmlns:a16="http://schemas.microsoft.com/office/drawing/2014/main" id="{DC77EC98-8B46-61BD-2C76-76D12652EFF1}"/>
-              </a:ext>
-            </a:extLst>
-          </p:cNvPr>
-          <p:cNvSpPr txBox="1"/>
-          <p:nvPr/>
-        </p:nvSpPr>
-        <p:spPr>
-          <a:xfrm>
-            <a:off x="7390907" y="637371"/>
-            <a:ext cx="1235798" cy="1569660"/>
-          </a:xfrm>
-          <a:prstGeom prst="rect">
-            <a:avLst/>
-          </a:prstGeom>
-          <a:noFill/>
-        </p:spPr>
-        <p:txBody>
-          <a:bodyPr wrap="square">
-            <a:spAutoFit/>
-          </a:bodyPr>
-          <a:lstStyle/>
-          <a:p>
-            <a:r>
-              <a:rPr lang="en-US" altLang="zh-TW" sz="9600" b="1" dirty="0">
-                <a:solidFill>
-                  <a:srgbClr val="FF0000"/>
-                </a:solidFill>
-                <a:effectLst>
-                  <a:outerShdw blurRad="38100" dist="38100" dir="2700000" algn="tl">
-                    <a:srgbClr val="000000">
-                      <a:alpha val="43137"/>
-                    </a:srgbClr>
-                  </a:outerShdw>
-                </a:effectLst>
-              </a:rPr>
-              <a:t>? </a:t>
-            </a:r>
-            <a:endParaRPr lang="zh-TW" altLang="en-US" sz="9600" b="1" dirty="0">
-              <a:solidFill>
-                <a:srgbClr val="FF0000"/>
-              </a:solidFill>
-              <a:effectLst>
-                <a:outerShdw blurRad="38100" dist="38100" dir="2700000" algn="tl">
-                  <a:srgbClr val="000000">
-                    <a:alpha val="43137"/>
-                  </a:srgbClr>
-                </a:outerShdw>
-              </a:effectLst>
-            </a:endParaRPr>
-          </a:p>
-        </p:txBody>
-      </p:sp>
-    </p:spTree>
-    <p:extLst>
-      <p:ext uri="{BB962C8B-B14F-4D97-AF65-F5344CB8AC3E}">
-        <p14:creationId xmlns:p14="http://schemas.microsoft.com/office/powerpoint/2010/main" val="3397872819"/>
-      </p:ext>
-    </p:extLst>
-  </p:cSld>
-  <p:clrMapOvr>
-    <a:masterClrMapping/>
-  </p:clrMapOvr>
-</p:sld>
-</file>
-
-<file path=ppt/slides/slide24.xml><?xml version="1.0" encoding="utf-8"?>
-<p:sld xmlns:a="http://schemas.openxmlformats.org/drawingml/2006/main" xmlns:r="http://schemas.openxmlformats.org/officeDocument/2006/relationships" xmlns:p="http://schemas.openxmlformats.org/presentationml/2006/main">
-  <p:cSld>
     <p:bg>
       <p:bgPr>
         <a:solidFill>
@@ -26015,7 +25464,7 @@
 </p:sld>
 </file>
 
-<file path=ppt/slides/slide25.xml><?xml version="1.0" encoding="utf-8"?>
+<file path=ppt/slides/slide24.xml><?xml version="1.0" encoding="utf-8"?>
 <p:sld xmlns:a="http://schemas.openxmlformats.org/drawingml/2006/main" xmlns:r="http://schemas.openxmlformats.org/officeDocument/2006/relationships" xmlns:p="http://schemas.openxmlformats.org/presentationml/2006/main">
   <p:cSld>
     <p:bg>
@@ -26481,7 +25930,7 @@
 </p:sld>
 </file>
 
-<file path=ppt/slides/slide26.xml><?xml version="1.0" encoding="utf-8"?>
+<file path=ppt/slides/slide25.xml><?xml version="1.0" encoding="utf-8"?>
 <p:sld xmlns:a="http://schemas.openxmlformats.org/drawingml/2006/main" xmlns:r="http://schemas.openxmlformats.org/officeDocument/2006/relationships" xmlns:p="http://schemas.openxmlformats.org/presentationml/2006/main">
   <p:cSld>
     <p:bg>
@@ -27174,7 +26623,7 @@
 </p:sld>
 </file>
 
-<file path=ppt/slides/slide27.xml><?xml version="1.0" encoding="utf-8"?>
+<file path=ppt/slides/slide26.xml><?xml version="1.0" encoding="utf-8"?>
 <p:sld xmlns:a="http://schemas.openxmlformats.org/drawingml/2006/main" xmlns:r="http://schemas.openxmlformats.org/officeDocument/2006/relationships" xmlns:p="http://schemas.openxmlformats.org/presentationml/2006/main">
   <p:cSld>
     <p:bg>
@@ -27770,7 +27219,7 @@
 </p:sld>
 </file>
 
-<file path=ppt/slides/slide28.xml><?xml version="1.0" encoding="utf-8"?>
+<file path=ppt/slides/slide27.xml><?xml version="1.0" encoding="utf-8"?>
 <p:sld xmlns:a="http://schemas.openxmlformats.org/drawingml/2006/main" xmlns:r="http://schemas.openxmlformats.org/officeDocument/2006/relationships" xmlns:p="http://schemas.openxmlformats.org/presentationml/2006/main" show="0">
   <p:cSld>
     <p:bg>
